--- a/slides/sports_cnn_presentation.pptx
+++ b/slides/sports_cnn_presentation.pptx
@@ -583,7 +583,7 @@
           <a:lstStyle/>
           <a:p>
             <a:r>
-              <a:t>Show Grad-CAM and SHAP agree on correct cases and expose background reliance on wrong ones. ~45s.</a:t>
+              <a:t>Show Grad-CAM and SHAP agree on correct cases and expose background reliance on wrong ones. ~45s. ⚠ Replace the two figure placeholders with gradcam.png and shap.png from results.zip before recording.</a:t>
             </a:r>
           </a:p>
         </p:txBody>
@@ -653,7 +653,7 @@
           <a:lstStyle/>
           <a:p>
             <a:r>
-              <a:t>Argue for balance over raw accuracy; introduce the live demo (you will show it in the 2-min demo part). ~40s.</a:t>
+              <a:t>Argue for balance over raw accuracy; introduce the live demo (you will show it in the 2-min demo part). ~40s. ⚠ Size/latency numbers are placeholders — replace with real Kaggle results before recording.</a:t>
             </a:r>
           </a:p>
         </p:txBody>
@@ -723,7 +723,7 @@
           <a:lstStyle/>
           <a:p>
             <a:r>
-              <a:t>Summarise the four takeaways, state limitations honestly, and thank the audience. ~40s.</a:t>
+              <a:t>Summarise the four takeaways, state limitations honestly, and thank the audience. ~40s. ⚠ The ~91% headline is a placeholder — replace with your real best-model accuracy before recording.</a:t>
             </a:r>
           </a:p>
         </p:txBody>
@@ -863,7 +863,7 @@
           <a:lstStyle/>
           <a:p>
             <a:r>
-              <a:t>Describe the dataset and preprocessing. Point to the sample grid and the near-balanced distribution. ~40s.</a:t>
+              <a:t>Describe the dataset and preprocessing. Point to the sample grid and the near-balanced distribution. ~40s. ⚠ Replace the two figure placeholders with sample_grid.png and class_distribution.png from results.zip before recording.</a:t>
             </a:r>
           </a:p>
         </p:txBody>
@@ -1143,7 +1143,7 @@
           <a:lstStyle/>
           <a:p>
             <a:r>
-              <a:t>Read the training curves: convergence, early stopping, and the train-val gap as an overfitting check. ~35s.</a:t>
+              <a:t>Read the training curves: convergence, early stopping, and the train-val gap as an overfitting check. ~35s. ⚠ Replace the figure placeholder with training_curves.png from results.zip before recording.</a:t>
             </a:r>
           </a:p>
         </p:txBody>
@@ -1283,7 +1283,7 @@
           <a:lstStyle/>
           <a:p>
             <a:r>
-              <a:t>Use the confusion matrix to name the hardest, most-confused sports and the easiest ones. ~35s.</a:t>
+              <a:t>Use the confusion matrix to name the hardest, most-confused sports and the easiest ones. ~35s. ⚠ Replace the figure placeholder with confusion_matrix.png from results.zip before recording.</a:t>
             </a:r>
           </a:p>
         </p:txBody>
@@ -5708,7 +5708,7 @@
                 </a:solidFill>
                 <a:latin typeface="Calibri"/>
               </a:rPr>
-              <a:t>4.9 MB · 3.4 ms.</a:t>
+              <a:t>16 MB · 31.5 ms.</a:t>
             </a:r>
           </a:p>
           <a:p>
@@ -5727,7 +5727,7 @@
                 </a:solidFill>
                 <a:latin typeface="Calibri"/>
               </a:rPr>
-              <a:t>Smallest and fastest; best where compute is tight.</a:t>
+              <a:t>Fewest parameters and smallest file — yet, counter-intuitively, the slowest at inference (architecture matters more than param count).</a:t>
             </a:r>
           </a:p>
         </p:txBody>
@@ -5834,7 +5834,7 @@
                 </a:solidFill>
                 <a:latin typeface="Calibri"/>
               </a:rPr>
-              <a:t>38 MB · 4.8 ms.</a:t>
+              <a:t>28 MB · 20.4 ms.</a:t>
             </a:r>
           </a:p>
           <a:p>
@@ -5853,7 +5853,7 @@
                 </a:solidFill>
                 <a:latin typeface="Calibri"/>
               </a:rPr>
-              <a:t>Top accuracy, compact, fast.</a:t>
+              <a:t>Highest accuracy AND lowest latency.</a:t>
             </a:r>
           </a:p>
           <a:p>
@@ -5979,7 +5979,7 @@
                 </a:solidFill>
                 <a:latin typeface="Calibri"/>
               </a:rPr>
-              <a:t>235 MB · 12.9 ms.</a:t>
+              <a:t>114 MB · 23.2 ms.</a:t>
             </a:r>
           </a:p>
           <a:p>
@@ -5998,7 +5998,7 @@
                 </a:solidFill>
                 <a:latin typeface="Calibri"/>
               </a:rPr>
-              <a:t>Highest capacity, but ~6x larger and slower for marginal gains.</a:t>
+              <a:t>Highest capacity and largest footprint, for slightly lower accuracy.</a:t>
             </a:r>
           </a:p>
         </p:txBody>
@@ -9853,7 +9853,7 @@
                 </a:solidFill>
                 <a:latin typeface="Calibri"/>
               </a:rPr>
-              <a:t>Lightweight baseline.</a:t>
+              <a:t>~4.0M parameters; lightweight baseline.</a:t>
             </a:r>
           </a:p>
         </p:txBody>
@@ -9998,7 +9998,7 @@
                 </a:solidFill>
                 <a:latin typeface="Calibri"/>
               </a:rPr>
-              <a:t>Two-phase fine-tuning; ~6-7M parameters.</a:t>
+              <a:t>Two-phase fine-tuning; ~7.1M parameters.</a:t>
             </a:r>
           </a:p>
           <a:p>
@@ -10162,7 +10162,7 @@
                 </a:solidFill>
                 <a:latin typeface="Calibri"/>
               </a:rPr>
-              <a:t>Two-phase fine-tuning; ~28M parameters.</a:t>
+              <a:t>Two-phase fine-tuning; ~28.6M parameters.</a:t>
             </a:r>
           </a:p>
           <a:p>
@@ -10991,7 +10991,7 @@
         </p:nvGraphicFramePr>
         <p:xfrm>
           <a:off x="640080" y="1828800"/>
-          <a:ext cx="10908791" cy="2240280"/>
+          <a:ext cx="10908790" cy="2240280"/>
         </p:xfrm>
         <a:graphic>
           <a:graphicData uri="http://schemas.openxmlformats.org/drawingml/2006/table">
@@ -11000,12 +11000,13 @@
                 <a:tableStyleId>{5C22544A-7EE6-4342-B048-85BDC9FD1C3A}</a:tableStyleId>
               </a:tblPr>
               <a:tblGrid>
-                <a:gridCol w="3108960"/>
-                <a:gridCol w="1600199"/>
-                <a:gridCol w="1508760"/>
-                <a:gridCol w="1325880"/>
-                <a:gridCol w="1627632"/>
-                <a:gridCol w="1737360"/>
+                <a:gridCol w="2669662"/>
+                <a:gridCol w="1426888"/>
+                <a:gridCol w="1426888"/>
+                <a:gridCol w="1196745"/>
+                <a:gridCol w="1334831"/>
+                <a:gridCol w="1334831"/>
+                <a:gridCol w="1518945"/>
               </a:tblGrid>
               <a:tr h="560070">
                 <a:tc>
@@ -11113,7 +11114,7 @@
                           </a:solidFill>
                           <a:latin typeface="Calibri"/>
                         </a:rPr>
-                        <a:t>Inference</a:t>
+                        <a:t>Params</a:t>
                       </a:r>
                     </a:p>
                   </a:txBody>
@@ -11137,6 +11138,29 @@
                           <a:latin typeface="Calibri"/>
                         </a:rPr>
                         <a:t>Size</a:t>
+                      </a:r>
+                    </a:p>
+                  </a:txBody>
+                  <a:tcPr anchor="ctr">
+                    <a:solidFill>
+                      <a:srgbClr val="213952"/>
+                    </a:solidFill>
+                  </a:tcPr>
+                </a:tc>
+                <a:tc>
+                  <a:txBody>
+                    <a:bodyPr/>
+                    <a:lstStyle/>
+                    <a:p>
+                      <a:pPr algn="ctr"/>
+                      <a:r>
+                        <a:rPr sz="1400" b="1" i="0">
+                          <a:solidFill>
+                            <a:srgbClr val="FFFFFF"/>
+                          </a:solidFill>
+                          <a:latin typeface="Calibri"/>
+                        </a:rPr>
+                        <a:t>Inference</a:t>
                       </a:r>
                     </a:p>
                   </a:txBody>
@@ -11230,7 +11254,7 @@
                           </a:solidFill>
                           <a:latin typeface="Calibri"/>
                         </a:rPr>
-                        <a:t>0.921</a:t>
+                        <a:t>0.928</a:t>
                       </a:r>
                     </a:p>
                   </a:txBody>
@@ -11253,7 +11277,7 @@
                           </a:solidFill>
                           <a:latin typeface="Calibri"/>
                         </a:rPr>
-                        <a:t>3.4 ms</a:t>
+                        <a:t>4.0 M</a:t>
                       </a:r>
                     </a:p>
                   </a:txBody>
@@ -11276,7 +11300,30 @@
                           </a:solidFill>
                           <a:latin typeface="Calibri"/>
                         </a:rPr>
-                        <a:t>4.9 MB</a:t>
+                        <a:t>16 MB</a:t>
+                      </a:r>
+                    </a:p>
+                  </a:txBody>
+                  <a:tcPr anchor="ctr">
+                    <a:solidFill>
+                      <a:srgbClr val="FFFFFF"/>
+                    </a:solidFill>
+                  </a:tcPr>
+                </a:tc>
+                <a:tc>
+                  <a:txBody>
+                    <a:bodyPr/>
+                    <a:lstStyle/>
+                    <a:p>
+                      <a:pPr algn="ctr"/>
+                      <a:r>
+                        <a:rPr sz="1350" b="0" i="0">
+                          <a:solidFill>
+                            <a:srgbClr val="1F2A37"/>
+                          </a:solidFill>
+                          <a:latin typeface="Calibri"/>
+                        </a:rPr>
+                        <a:t>31.5 ms</a:t>
                       </a:r>
                     </a:p>
                   </a:txBody>
@@ -11370,7 +11417,7 @@
                           </a:solidFill>
                           <a:latin typeface="Calibri"/>
                         </a:rPr>
-                        <a:t>0.974</a:t>
+                        <a:t>0.976</a:t>
                       </a:r>
                     </a:p>
                   </a:txBody>
@@ -11393,7 +11440,7 @@
                           </a:solidFill>
                           <a:latin typeface="Calibri"/>
                         </a:rPr>
-                        <a:t>4.8 ms</a:t>
+                        <a:t>7.1 M</a:t>
                       </a:r>
                     </a:p>
                   </a:txBody>
@@ -11416,7 +11463,30 @@
                           </a:solidFill>
                           <a:latin typeface="Calibri"/>
                         </a:rPr>
-                        <a:t>38 MB</a:t>
+                        <a:t>28 MB</a:t>
+                      </a:r>
+                    </a:p>
+                  </a:txBody>
+                  <a:tcPr anchor="ctr">
+                    <a:solidFill>
+                      <a:srgbClr val="EEF4FB"/>
+                    </a:solidFill>
+                  </a:tcPr>
+                </a:tc>
+                <a:tc>
+                  <a:txBody>
+                    <a:bodyPr/>
+                    <a:lstStyle/>
+                    <a:p>
+                      <a:pPr algn="ctr"/>
+                      <a:r>
+                        <a:rPr sz="1350" b="0" i="0">
+                          <a:solidFill>
+                            <a:srgbClr val="213952"/>
+                          </a:solidFill>
+                          <a:latin typeface="Calibri"/>
+                        </a:rPr>
+                        <a:t>20.4 ms</a:t>
                       </a:r>
                     </a:p>
                   </a:txBody>
@@ -11510,7 +11580,7 @@
                           </a:solidFill>
                           <a:latin typeface="Calibri"/>
                         </a:rPr>
-                        <a:t>0.962</a:t>
+                        <a:t>0.965</a:t>
                       </a:r>
                     </a:p>
                   </a:txBody>
@@ -11533,7 +11603,7 @@
                           </a:solidFill>
                           <a:latin typeface="Calibri"/>
                         </a:rPr>
-                        <a:t>12.9 ms</a:t>
+                        <a:t>28.6 M</a:t>
                       </a:r>
                     </a:p>
                   </a:txBody>
@@ -11556,7 +11626,30 @@
                           </a:solidFill>
                           <a:latin typeface="Calibri"/>
                         </a:rPr>
-                        <a:t>235 MB</a:t>
+                        <a:t>114 MB</a:t>
+                      </a:r>
+                    </a:p>
+                  </a:txBody>
+                  <a:tcPr anchor="ctr">
+                    <a:solidFill>
+                      <a:srgbClr val="FFFFFF"/>
+                    </a:solidFill>
+                  </a:tcPr>
+                </a:tc>
+                <a:tc>
+                  <a:txBody>
+                    <a:bodyPr/>
+                    <a:lstStyle/>
+                    <a:p>
+                      <a:pPr algn="ctr"/>
+                      <a:r>
+                        <a:rPr sz="1350" b="0" i="0">
+                          <a:solidFill>
+                            <a:srgbClr val="1F2A37"/>
+                          </a:solidFill>
+                          <a:latin typeface="Calibri"/>
+                        </a:rPr>
+                        <a:t>23.2 ms</a:t>
                       </a:r>
                     </a:p>
                   </a:txBody>
@@ -11780,7 +11873,7 @@
                 </a:solidFill>
                 <a:latin typeface="Calibri"/>
               </a:rPr>
-              <a:t>EfficientNetV2-B0 matches the top accuracy at a fraction of ConvNeXt-Tiny's size and latency — the best balance for deployment (RQ4).</a:t>
+              <a:t>EfficientNetV2-B0 delivers the highest accuracy AND the lowest latency at about a quarter of ConvNeXt-Tiny's size — the best balance for deployment (RQ4).</a:t>
             </a:r>
           </a:p>
         </p:txBody>

--- a/slides/sports_cnn_presentation.pptx
+++ b/slides/sports_cnn_presentation.pptx
@@ -583,7 +583,7 @@
           <a:lstStyle/>
           <a:p>
             <a:r>
-              <a:t>Show Grad-CAM and SHAP agree on correct cases and expose background reliance on wrong ones. ~45s. ⚠ Replace the two figure placeholders with gradcam.png and shap.png from results.zip before recording.</a:t>
+              <a:t>Show Grad-CAM and SHAP agree on correct cases and expose background reliance on wrong ones. ~45s.</a:t>
             </a:r>
           </a:p>
         </p:txBody>
@@ -653,7 +653,7 @@
           <a:lstStyle/>
           <a:p>
             <a:r>
-              <a:t>Argue for balance over raw accuracy; introduce the live demo (you will show it in the 2-min demo part). ~40s. ⚠ Size/latency numbers are placeholders — replace with real Kaggle results before recording.</a:t>
+              <a:t>Argue for balance over raw accuracy: EfficientNetV2-B0 is the efficiency pick, ConvNeXt-Tiny the accuracy pick (and what is deployed). Introduce the live demo. ~40s.</a:t>
             </a:r>
           </a:p>
         </p:txBody>
@@ -723,7 +723,7 @@
           <a:lstStyle/>
           <a:p>
             <a:r>
-              <a:t>Summarise the four takeaways, state limitations honestly, and thank the audience. ~40s. ⚠ The ~91% headline is a placeholder — replace with your real best-model accuracy before recording.</a:t>
+              <a:t>Summarise the four takeaways, state limitations honestly, and thank the audience. ~40s.</a:t>
             </a:r>
           </a:p>
         </p:txBody>
@@ -863,7 +863,7 @@
           <a:lstStyle/>
           <a:p>
             <a:r>
-              <a:t>Describe the dataset and preprocessing. Point to the sample grid and the near-balanced distribution. ~40s. ⚠ Replace the two figure placeholders with sample_grid.png and class_distribution.png from results.zip before recording.</a:t>
+              <a:t>Describe the dataset and preprocessing. Point to the sample grid and the near-balanced distribution (59–191 images/class, mean ~135). ~40s.</a:t>
             </a:r>
           </a:p>
         </p:txBody>
@@ -1143,7 +1143,7 @@
           <a:lstStyle/>
           <a:p>
             <a:r>
-              <a:t>Read the training curves: convergence, early stopping, and the train-val gap as an overfitting check. ~35s. ⚠ Replace the figure placeholder with training_curves.png from results.zip before recording.</a:t>
+              <a:t>Read the training curves: convergence, early stopping, and the train-val gap as an overfitting check. ~35s.</a:t>
             </a:r>
           </a:p>
         </p:txBody>
@@ -1213,7 +1213,7 @@
           <a:lstStyle/>
           <a:p>
             <a:r>
-              <a:t>⚠ PLACEHOLDER NUMBERS — replace with your real Kaggle results before recording. After the run, set the ✓ on whichever model gives the best accuracy/size/speed balance and update every number in this table. ~50s.</a:t>
+              <a:t>Walk through the table: ConvNeXt-Tiny is most accurate (marked ✓), EfficientNetV2-B0 is nearly tied but far cheaper, and the custom CNN trails badly. Stress the ~49-point transfer-learning gain. ~50s.</a:t>
             </a:r>
           </a:p>
         </p:txBody>
@@ -1283,7 +1283,7 @@
           <a:lstStyle/>
           <a:p>
             <a:r>
-              <a:t>Use the confusion matrix to name the hardest, most-confused sports and the easiest ones. ~35s. ⚠ Replace the figure placeholder with confusion_matrix.png from results.zip before recording.</a:t>
+              <a:t>Use the confusion matrix to name the hardest, most-confused sports (frisbee, baton twirling, horseshoe pitching) and the perfect ones. ~35s.</a:t>
             </a:r>
           </a:p>
         </p:txBody>
@@ -4868,29 +4868,159 @@
           </a:p>
         </p:txBody>
       </p:sp>
-      <p:sp>
-        <p:nvSpPr>
-          <p:cNvPr id="7" name="Rounded Rectangle 6"/>
+      <p:pic>
+        <p:nvPicPr>
+          <p:cNvPr id="7" name="Picture 6" descr="gradcam.png"/>
+          <p:cNvPicPr>
+            <a:picLocks noChangeAspect="1"/>
+          </p:cNvPicPr>
+          <p:nvPr/>
+        </p:nvPicPr>
+        <p:blipFill>
+          <a:blip r:embed="rId2"/>
+          <a:stretch>
+            <a:fillRect/>
+          </a:stretch>
+        </p:blipFill>
+        <p:spPr>
+          <a:xfrm>
+            <a:off x="640080" y="2099854"/>
+            <a:ext cx="5349240" cy="2292531"/>
+          </a:xfrm>
+          <a:prstGeom prst="rect">
+            <a:avLst/>
+          </a:prstGeom>
+        </p:spPr>
+      </p:pic>
+      <p:sp>
+        <p:nvSpPr>
+          <p:cNvPr id="8" name="TextBox 7"/>
+          <p:cNvSpPr txBox="1"/>
+          <p:nvPr/>
+        </p:nvSpPr>
+        <p:spPr>
+          <a:xfrm>
+            <a:off x="640080" y="4636007"/>
+            <a:ext cx="5349240" cy="274320"/>
+          </a:xfrm>
+          <a:prstGeom prst="rect">
+            <a:avLst/>
+          </a:prstGeom>
+          <a:noFill/>
+        </p:spPr>
+        <p:txBody>
+          <a:bodyPr wrap="square" anchor="t" lIns="45720" rIns="45720" tIns="18288" bIns="18288">
+            <a:spAutoFit/>
+          </a:bodyPr>
+          <a:lstStyle/>
+          <a:p>
+            <a:pPr algn="ctr">
+              <a:spcBef>
+                <a:spcPts val="0"/>
+              </a:spcBef>
+              <a:spcAft>
+                <a:spcPts val="0"/>
+              </a:spcAft>
+            </a:pPr>
+            <a:r>
+              <a:rPr sz="1050" b="0" i="1">
+                <a:solidFill>
+                  <a:srgbClr val="556374"/>
+                </a:solidFill>
+                <a:latin typeface="Calibri"/>
+              </a:rPr>
+              <a:t>Grad-CAM — class activation heatmaps</a:t>
+            </a:r>
+          </a:p>
+        </p:txBody>
+      </p:sp>
+      <p:pic>
+        <p:nvPicPr>
+          <p:cNvPr id="9" name="Picture 8" descr="shap.png"/>
+          <p:cNvPicPr>
+            <a:picLocks noChangeAspect="1"/>
+          </p:cNvPicPr>
+          <p:nvPr/>
+        </p:nvPicPr>
+        <p:blipFill>
+          <a:blip r:embed="rId3"/>
+          <a:stretch>
+            <a:fillRect/>
+          </a:stretch>
+        </p:blipFill>
+        <p:spPr>
+          <a:xfrm>
+            <a:off x="7965270" y="1874519"/>
+            <a:ext cx="1817963" cy="2743199"/>
+          </a:xfrm>
+          <a:prstGeom prst="rect">
+            <a:avLst/>
+          </a:prstGeom>
+        </p:spPr>
+      </p:pic>
+      <p:sp>
+        <p:nvSpPr>
+          <p:cNvPr id="10" name="TextBox 9"/>
+          <p:cNvSpPr txBox="1"/>
+          <p:nvPr/>
+        </p:nvSpPr>
+        <p:spPr>
+          <a:xfrm>
+            <a:off x="6199632" y="4636007"/>
+            <a:ext cx="5349240" cy="274320"/>
+          </a:xfrm>
+          <a:prstGeom prst="rect">
+            <a:avLst/>
+          </a:prstGeom>
+          <a:noFill/>
+        </p:spPr>
+        <p:txBody>
+          <a:bodyPr wrap="square" anchor="t" lIns="45720" rIns="45720" tIns="18288" bIns="18288">
+            <a:spAutoFit/>
+          </a:bodyPr>
+          <a:lstStyle/>
+          <a:p>
+            <a:pPr algn="ctr">
+              <a:spcBef>
+                <a:spcPts val="0"/>
+              </a:spcBef>
+              <a:spcAft>
+                <a:spcPts val="0"/>
+              </a:spcAft>
+            </a:pPr>
+            <a:r>
+              <a:rPr sz="1050" b="0" i="1">
+                <a:solidFill>
+                  <a:srgbClr val="556374"/>
+                </a:solidFill>
+                <a:latin typeface="Calibri"/>
+              </a:rPr>
+              <a:t>SHAP — pixel-level attributions</a:t>
+            </a:r>
+          </a:p>
+        </p:txBody>
+      </p:sp>
+      <p:sp>
+        <p:nvSpPr>
+          <p:cNvPr id="11" name="Rounded Rectangle 10"/>
           <p:cNvSpPr/>
           <p:nvPr/>
         </p:nvSpPr>
         <p:spPr>
           <a:xfrm>
-            <a:off x="640080" y="1874519"/>
-            <a:ext cx="5349240" cy="2743200"/>
+            <a:off x="640080" y="5074920"/>
+            <a:ext cx="5349240" cy="1280160"/>
           </a:xfrm>
           <a:prstGeom prst="roundRect">
             <a:avLst>
-              <a:gd name="adj" fmla="val 3000"/>
+              <a:gd name="adj" fmla="val 8000"/>
             </a:avLst>
           </a:prstGeom>
           <a:solidFill>
-            <a:srgbClr val="F1F4F8"/>
+            <a:srgbClr val="D9F0DE"/>
           </a:solidFill>
-          <a:ln w="15875">
-            <a:solidFill>
-              <a:srgbClr val="B6C4D6"/>
-            </a:solidFill>
+          <a:ln>
+            <a:noFill/>
           </a:ln>
           <a:effectLst/>
         </p:spPr>
@@ -4918,14 +5048,14 @@
       </p:sp>
       <p:sp>
         <p:nvSpPr>
-          <p:cNvPr id="8" name="TextBox 7"/>
+          <p:cNvPr id="12" name="TextBox 11"/>
           <p:cNvSpPr txBox="1"/>
           <p:nvPr/>
         </p:nvSpPr>
         <p:spPr>
           <a:xfrm>
-            <a:off x="640080" y="1874519"/>
-            <a:ext cx="5349240" cy="2743200"/>
+            <a:off x="841247" y="5276088"/>
+            <a:ext cx="4946903" cy="877824"/>
           </a:xfrm>
           <a:prstGeom prst="rect">
             <a:avLst/>
@@ -4938,7 +5068,7 @@
           </a:bodyPr>
           <a:lstStyle/>
           <a:p>
-            <a:pPr algn="ctr">
+            <a:pPr algn="l">
               <a:spcBef>
                 <a:spcPts val="0"/>
               </a:spcBef>
@@ -4947,101 +5077,57 @@
               </a:spcAft>
             </a:pPr>
             <a:r>
-              <a:rPr sz="1400" b="1" i="0">
-                <a:solidFill>
-                  <a:srgbClr val="556374"/>
+              <a:rPr sz="1500" b="1" i="0">
+                <a:solidFill>
+                  <a:srgbClr val="1E7A34"/>
                 </a:solidFill>
                 <a:latin typeface="Calibri"/>
               </a:rPr>
-              <a:t>🖼  gradcam.png</a:t>
-            </a:r>
-          </a:p>
-          <a:p>
-            <a:pPr algn="ctr">
-              <a:spcBef>
-                <a:spcPts val="0"/>
-              </a:spcBef>
-              <a:spcAft>
-                <a:spcPts val="0"/>
-              </a:spcAft>
-            </a:pPr>
-            <a:r>
-              <a:rPr sz="1100" b="0" i="1">
-                <a:solidFill>
-                  <a:srgbClr val="556374"/>
+              <a:t>✓  Methods agree</a:t>
+            </a:r>
+          </a:p>
+          <a:p>
+            <a:pPr algn="l">
+              <a:spcBef>
+                <a:spcPts val="0"/>
+              </a:spcBef>
+              <a:spcAft>
+                <a:spcPts val="0"/>
+              </a:spcAft>
+            </a:pPr>
+            <a:r>
+              <a:rPr sz="1250" b="0" i="0">
+                <a:solidFill>
+                  <a:srgbClr val="1E7A34"/>
                 </a:solidFill>
                 <a:latin typeface="Calibri"/>
               </a:rPr>
-              <a:t>paste from results.zip (Kaggle run)</a:t>
-            </a:r>
-          </a:p>
-        </p:txBody>
-      </p:sp>
-      <p:sp>
-        <p:nvSpPr>
-          <p:cNvPr id="9" name="TextBox 8"/>
-          <p:cNvSpPr txBox="1"/>
-          <p:nvPr/>
-        </p:nvSpPr>
-        <p:spPr>
-          <a:xfrm>
-            <a:off x="640080" y="4636007"/>
-            <a:ext cx="5349240" cy="274320"/>
-          </a:xfrm>
-          <a:prstGeom prst="rect">
-            <a:avLst/>
-          </a:prstGeom>
-          <a:noFill/>
-        </p:spPr>
-        <p:txBody>
-          <a:bodyPr wrap="square" anchor="t" lIns="45720" rIns="45720" tIns="18288" bIns="18288">
-            <a:spAutoFit/>
-          </a:bodyPr>
-          <a:lstStyle/>
-          <a:p>
-            <a:pPr algn="ctr">
-              <a:spcBef>
-                <a:spcPts val="0"/>
-              </a:spcBef>
-              <a:spcAft>
-                <a:spcPts val="0"/>
-              </a:spcAft>
-            </a:pPr>
-            <a:r>
-              <a:rPr sz="1050" b="0" i="1">
-                <a:solidFill>
-                  <a:srgbClr val="556374"/>
-                </a:solidFill>
-                <a:latin typeface="Calibri"/>
-              </a:rPr>
-              <a:t>Grad-CAM — class activation heatmaps</a:t>
-            </a:r>
-          </a:p>
-        </p:txBody>
-      </p:sp>
-      <p:sp>
-        <p:nvSpPr>
-          <p:cNvPr id="10" name="Rounded Rectangle 9"/>
+              <a:t>Both methods are computed independently yet highlight the athlete, ball and playing area — strengthening trust that predictions use meaningful features (RQ3).</a:t>
+            </a:r>
+          </a:p>
+        </p:txBody>
+      </p:sp>
+      <p:sp>
+        <p:nvSpPr>
+          <p:cNvPr id="13" name="Rounded Rectangle 12"/>
           <p:cNvSpPr/>
           <p:nvPr/>
         </p:nvSpPr>
         <p:spPr>
           <a:xfrm>
-            <a:off x="6199632" y="1874519"/>
-            <a:ext cx="5349240" cy="2743200"/>
+            <a:off x="6199632" y="5074920"/>
+            <a:ext cx="5349240" cy="1280160"/>
           </a:xfrm>
           <a:prstGeom prst="roundRect">
             <a:avLst>
-              <a:gd name="adj" fmla="val 3000"/>
+              <a:gd name="adj" fmla="val 8000"/>
             </a:avLst>
           </a:prstGeom>
           <a:solidFill>
-            <a:srgbClr val="F1F4F8"/>
+            <a:srgbClr val="F9DADD"/>
           </a:solidFill>
-          <a:ln w="15875">
-            <a:solidFill>
-              <a:srgbClr val="B6C4D6"/>
-            </a:solidFill>
+          <a:ln>
+            <a:noFill/>
           </a:ln>
           <a:effectLst/>
         </p:spPr>
@@ -5069,263 +5155,7 @@
       </p:sp>
       <p:sp>
         <p:nvSpPr>
-          <p:cNvPr id="11" name="TextBox 10"/>
-          <p:cNvSpPr txBox="1"/>
-          <p:nvPr/>
-        </p:nvSpPr>
-        <p:spPr>
-          <a:xfrm>
-            <a:off x="6199632" y="1874519"/>
-            <a:ext cx="5349240" cy="2743200"/>
-          </a:xfrm>
-          <a:prstGeom prst="rect">
-            <a:avLst/>
-          </a:prstGeom>
-          <a:noFill/>
-        </p:spPr>
-        <p:txBody>
-          <a:bodyPr wrap="square" anchor="ctr" lIns="45720" rIns="45720" tIns="18288" bIns="18288">
-            <a:spAutoFit/>
-          </a:bodyPr>
-          <a:lstStyle/>
-          <a:p>
-            <a:pPr algn="ctr">
-              <a:spcBef>
-                <a:spcPts val="0"/>
-              </a:spcBef>
-              <a:spcAft>
-                <a:spcPts val="400"/>
-              </a:spcAft>
-            </a:pPr>
-            <a:r>
-              <a:rPr sz="1400" b="1" i="0">
-                <a:solidFill>
-                  <a:srgbClr val="556374"/>
-                </a:solidFill>
-                <a:latin typeface="Calibri"/>
-              </a:rPr>
-              <a:t>🖼  shap.png</a:t>
-            </a:r>
-          </a:p>
-          <a:p>
-            <a:pPr algn="ctr">
-              <a:spcBef>
-                <a:spcPts val="0"/>
-              </a:spcBef>
-              <a:spcAft>
-                <a:spcPts val="0"/>
-              </a:spcAft>
-            </a:pPr>
-            <a:r>
-              <a:rPr sz="1100" b="0" i="1">
-                <a:solidFill>
-                  <a:srgbClr val="556374"/>
-                </a:solidFill>
-                <a:latin typeface="Calibri"/>
-              </a:rPr>
-              <a:t>paste from results.zip (Kaggle run)</a:t>
-            </a:r>
-          </a:p>
-        </p:txBody>
-      </p:sp>
-      <p:sp>
-        <p:nvSpPr>
-          <p:cNvPr id="12" name="TextBox 11"/>
-          <p:cNvSpPr txBox="1"/>
-          <p:nvPr/>
-        </p:nvSpPr>
-        <p:spPr>
-          <a:xfrm>
-            <a:off x="6199632" y="4636007"/>
-            <a:ext cx="5349240" cy="274320"/>
-          </a:xfrm>
-          <a:prstGeom prst="rect">
-            <a:avLst/>
-          </a:prstGeom>
-          <a:noFill/>
-        </p:spPr>
-        <p:txBody>
-          <a:bodyPr wrap="square" anchor="t" lIns="45720" rIns="45720" tIns="18288" bIns="18288">
-            <a:spAutoFit/>
-          </a:bodyPr>
-          <a:lstStyle/>
-          <a:p>
-            <a:pPr algn="ctr">
-              <a:spcBef>
-                <a:spcPts val="0"/>
-              </a:spcBef>
-              <a:spcAft>
-                <a:spcPts val="0"/>
-              </a:spcAft>
-            </a:pPr>
-            <a:r>
-              <a:rPr sz="1050" b="0" i="1">
-                <a:solidFill>
-                  <a:srgbClr val="556374"/>
-                </a:solidFill>
-                <a:latin typeface="Calibri"/>
-              </a:rPr>
-              <a:t>SHAP — pixel-level attributions</a:t>
-            </a:r>
-          </a:p>
-        </p:txBody>
-      </p:sp>
-      <p:sp>
-        <p:nvSpPr>
-          <p:cNvPr id="13" name="Rounded Rectangle 12"/>
-          <p:cNvSpPr/>
-          <p:nvPr/>
-        </p:nvSpPr>
-        <p:spPr>
-          <a:xfrm>
-            <a:off x="640080" y="5074920"/>
-            <a:ext cx="5349240" cy="1280160"/>
-          </a:xfrm>
-          <a:prstGeom prst="roundRect">
-            <a:avLst>
-              <a:gd name="adj" fmla="val 8000"/>
-            </a:avLst>
-          </a:prstGeom>
-          <a:solidFill>
-            <a:srgbClr val="D9F0DE"/>
-          </a:solidFill>
-          <a:ln>
-            <a:noFill/>
-          </a:ln>
-          <a:effectLst/>
-        </p:spPr>
-        <p:style>
-          <a:lnRef idx="1">
-            <a:schemeClr val="accent1"/>
-          </a:lnRef>
-          <a:fillRef idx="3">
-            <a:schemeClr val="accent1"/>
-          </a:fillRef>
-          <a:effectRef idx="2">
-            <a:schemeClr val="accent1"/>
-          </a:effectRef>
-          <a:fontRef idx="minor">
-            <a:schemeClr val="lt1"/>
-          </a:fontRef>
-        </p:style>
-        <p:txBody>
-          <a:bodyPr rtlCol="0" anchor="ctr"/>
-          <a:lstStyle/>
-          <a:p>
-            <a:pPr algn="ctr"/>
-          </a:p>
-        </p:txBody>
-      </p:sp>
-      <p:sp>
-        <p:nvSpPr>
           <p:cNvPr id="14" name="TextBox 13"/>
-          <p:cNvSpPr txBox="1"/>
-          <p:nvPr/>
-        </p:nvSpPr>
-        <p:spPr>
-          <a:xfrm>
-            <a:off x="841247" y="5276088"/>
-            <a:ext cx="4946903" cy="877824"/>
-          </a:xfrm>
-          <a:prstGeom prst="rect">
-            <a:avLst/>
-          </a:prstGeom>
-          <a:noFill/>
-        </p:spPr>
-        <p:txBody>
-          <a:bodyPr wrap="square" anchor="ctr" lIns="45720" rIns="45720" tIns="18288" bIns="18288">
-            <a:spAutoFit/>
-          </a:bodyPr>
-          <a:lstStyle/>
-          <a:p>
-            <a:pPr algn="l">
-              <a:spcBef>
-                <a:spcPts val="0"/>
-              </a:spcBef>
-              <a:spcAft>
-                <a:spcPts val="400"/>
-              </a:spcAft>
-            </a:pPr>
-            <a:r>
-              <a:rPr sz="1500" b="1" i="0">
-                <a:solidFill>
-                  <a:srgbClr val="1E7A34"/>
-                </a:solidFill>
-                <a:latin typeface="Calibri"/>
-              </a:rPr>
-              <a:t>✓  Methods agree</a:t>
-            </a:r>
-          </a:p>
-          <a:p>
-            <a:pPr algn="l">
-              <a:spcBef>
-                <a:spcPts val="0"/>
-              </a:spcBef>
-              <a:spcAft>
-                <a:spcPts val="0"/>
-              </a:spcAft>
-            </a:pPr>
-            <a:r>
-              <a:rPr sz="1250" b="0" i="0">
-                <a:solidFill>
-                  <a:srgbClr val="1E7A34"/>
-                </a:solidFill>
-                <a:latin typeface="Calibri"/>
-              </a:rPr>
-              <a:t>Both methods are computed independently yet highlight the athlete, ball and playing area — strengthening trust that predictions use meaningful features (RQ3).</a:t>
-            </a:r>
-          </a:p>
-        </p:txBody>
-      </p:sp>
-      <p:sp>
-        <p:nvSpPr>
-          <p:cNvPr id="15" name="Rounded Rectangle 14"/>
-          <p:cNvSpPr/>
-          <p:nvPr/>
-        </p:nvSpPr>
-        <p:spPr>
-          <a:xfrm>
-            <a:off x="6199632" y="5074920"/>
-            <a:ext cx="5349240" cy="1280160"/>
-          </a:xfrm>
-          <a:prstGeom prst="roundRect">
-            <a:avLst>
-              <a:gd name="adj" fmla="val 8000"/>
-            </a:avLst>
-          </a:prstGeom>
-          <a:solidFill>
-            <a:srgbClr val="F9DADD"/>
-          </a:solidFill>
-          <a:ln>
-            <a:noFill/>
-          </a:ln>
-          <a:effectLst/>
-        </p:spPr>
-        <p:style>
-          <a:lnRef idx="1">
-            <a:schemeClr val="accent1"/>
-          </a:lnRef>
-          <a:fillRef idx="3">
-            <a:schemeClr val="accent1"/>
-          </a:fillRef>
-          <a:effectRef idx="2">
-            <a:schemeClr val="accent1"/>
-          </a:effectRef>
-          <a:fontRef idx="minor">
-            <a:schemeClr val="lt1"/>
-          </a:fontRef>
-        </p:style>
-        <p:txBody>
-          <a:bodyPr rtlCol="0" anchor="ctr"/>
-          <a:lstStyle/>
-          <a:p>
-            <a:pPr algn="ctr"/>
-          </a:p>
-        </p:txBody>
-      </p:sp>
-      <p:sp>
-        <p:nvSpPr>
-          <p:cNvPr id="16" name="TextBox 15"/>
           <p:cNvSpPr txBox="1"/>
           <p:nvPr/>
         </p:nvSpPr>
@@ -5708,7 +5538,7 @@
                 </a:solidFill>
                 <a:latin typeface="Calibri"/>
               </a:rPr>
-              <a:t>16 MB · 31.5 ms.</a:t>
+              <a:t>1.9 MB · 0.6 ms.</a:t>
             </a:r>
           </a:p>
           <a:p>
@@ -5727,7 +5557,7 @@
                 </a:solidFill>
                 <a:latin typeface="Calibri"/>
               </a:rPr>
-              <a:t>Fewest parameters and smallest file — yet, counter-intuitively, the slowest at inference (architecture matters more than param count).</a:t>
+              <a:t>Smallest and fastest by far — but only 47% accuracy, so not usable in practice.</a:t>
             </a:r>
           </a:p>
         </p:txBody>
@@ -5834,7 +5664,7 @@
                 </a:solidFill>
                 <a:latin typeface="Calibri"/>
               </a:rPr>
-              <a:t>28 MB · 20.4 ms.</a:t>
+              <a:t>24 MB · 9.6 ms.</a:t>
             </a:r>
           </a:p>
           <a:p>
@@ -5853,7 +5683,7 @@
                 </a:solidFill>
                 <a:latin typeface="Calibri"/>
               </a:rPr>
-              <a:t>Highest accuracy AND lowest latency.</a:t>
+              <a:t>Within 0.2 pts of the best accuracy at ~1/5 the size and ~1/12 the latency.</a:t>
             </a:r>
           </a:p>
           <a:p>
@@ -5872,7 +5702,7 @@
                 </a:solidFill>
                 <a:latin typeface="Calibri"/>
               </a:rPr>
-              <a:t>Selected for deployment.</a:t>
+              <a:t>Best efficiency trade-off (recommended).</a:t>
             </a:r>
           </a:p>
         </p:txBody>
@@ -5979,7 +5809,7 @@
                 </a:solidFill>
                 <a:latin typeface="Calibri"/>
               </a:rPr>
-              <a:t>114 MB · 23.2 ms.</a:t>
+              <a:t>112 MB · 113 ms.</a:t>
             </a:r>
           </a:p>
           <a:p>
@@ -5998,7 +5828,7 @@
                 </a:solidFill>
                 <a:latin typeface="Calibri"/>
               </a:rPr>
-              <a:t>Highest capacity and largest footprint, for slightly lower accuracy.</a:t>
+              <a:t>Highest accuracy (96.4%) but largest and slowest — deployed as the top-accuracy model.</a:t>
             </a:r>
           </a:p>
         </p:txBody>
@@ -6432,7 +6262,7 @@
                 </a:solidFill>
                 <a:latin typeface="Calibri"/>
               </a:rPr>
-              <a:t>All three CNNs classify 100 sports well; the best exceeds ~91% test accuracy.</a:t>
+              <a:t>The pretrained CNNs classify 100 sports well; the best (ConvNeXt-Tiny) reaches 96.4% test accuracy.</a:t>
             </a:r>
           </a:p>
         </p:txBody>
@@ -6537,7 +6367,7 @@
                 </a:solidFill>
                 <a:latin typeface="Calibri"/>
               </a:rPr>
-              <a:t>ImageNet pretraining beats the from-scratch baseline by a wide margin (RQ1, RQ2).</a:t>
+              <a:t>ImageNet pretraining beats the from-scratch baseline by ~49 points — 96% vs 47% (RQ1, RQ2).</a:t>
             </a:r>
           </a:p>
         </p:txBody>
@@ -6747,7 +6577,7 @@
                 </a:solidFill>
                 <a:latin typeface="Calibri"/>
               </a:rPr>
-              <a:t>EfficientNetV2-B0 chosen for balance and shipped as an explainable web demo (RQ4, RQ5).</a:t>
+              <a:t>ConvNeXt-Tiny deployed as an explainable web demo; EfficientNetV2-B0 recommended for efficient deployment (RQ4, RQ5).</a:t>
             </a:r>
           </a:p>
         </p:txBody>
@@ -8052,118 +7882,33 @@
           </a:p>
         </p:txBody>
       </p:sp>
-      <p:sp>
-        <p:nvSpPr>
-          <p:cNvPr id="13" name="Rounded Rectangle 12"/>
-          <p:cNvSpPr/>
-          <p:nvPr/>
-        </p:nvSpPr>
-        <p:spPr>
-          <a:xfrm>
-            <a:off x="640080" y="3977639"/>
-            <a:ext cx="5349240" cy="2377440"/>
-          </a:xfrm>
-          <a:prstGeom prst="roundRect">
-            <a:avLst>
-              <a:gd name="adj" fmla="val 3000"/>
-            </a:avLst>
-          </a:prstGeom>
-          <a:solidFill>
-            <a:srgbClr val="F1F4F8"/>
-          </a:solidFill>
-          <a:ln w="15875">
-            <a:solidFill>
-              <a:srgbClr val="B6C4D6"/>
-            </a:solidFill>
-          </a:ln>
-          <a:effectLst/>
-        </p:spPr>
-        <p:style>
-          <a:lnRef idx="1">
-            <a:schemeClr val="accent1"/>
-          </a:lnRef>
-          <a:fillRef idx="3">
-            <a:schemeClr val="accent1"/>
-          </a:fillRef>
-          <a:effectRef idx="2">
-            <a:schemeClr val="accent1"/>
-          </a:effectRef>
-          <a:fontRef idx="minor">
-            <a:schemeClr val="lt1"/>
-          </a:fontRef>
-        </p:style>
-        <p:txBody>
-          <a:bodyPr rtlCol="0" anchor="ctr"/>
-          <a:lstStyle/>
-          <a:p>
-            <a:pPr algn="ctr"/>
-          </a:p>
-        </p:txBody>
-      </p:sp>
-      <p:sp>
-        <p:nvSpPr>
-          <p:cNvPr id="14" name="TextBox 13"/>
-          <p:cNvSpPr txBox="1"/>
-          <p:nvPr/>
-        </p:nvSpPr>
-        <p:spPr>
-          <a:xfrm>
-            <a:off x="640080" y="3977639"/>
-            <a:ext cx="5349240" cy="2377440"/>
+      <p:pic>
+        <p:nvPicPr>
+          <p:cNvPr id="13" name="Picture 12" descr="sample_grid.png"/>
+          <p:cNvPicPr>
+            <a:picLocks noChangeAspect="1"/>
+          </p:cNvPicPr>
+          <p:nvPr/>
+        </p:nvPicPr>
+        <p:blipFill>
+          <a:blip r:embed="rId2"/>
+          <a:stretch>
+            <a:fillRect/>
+          </a:stretch>
+        </p:blipFill>
+        <p:spPr>
+          <a:xfrm>
+            <a:off x="1597659" y="3977639"/>
+            <a:ext cx="3434080" cy="2377440"/>
           </a:xfrm>
           <a:prstGeom prst="rect">
             <a:avLst/>
           </a:prstGeom>
-          <a:noFill/>
-        </p:spPr>
-        <p:txBody>
-          <a:bodyPr wrap="square" anchor="ctr" lIns="45720" rIns="45720" tIns="18288" bIns="18288">
-            <a:spAutoFit/>
-          </a:bodyPr>
-          <a:lstStyle/>
-          <a:p>
-            <a:pPr algn="ctr">
-              <a:spcBef>
-                <a:spcPts val="0"/>
-              </a:spcBef>
-              <a:spcAft>
-                <a:spcPts val="400"/>
-              </a:spcAft>
-            </a:pPr>
-            <a:r>
-              <a:rPr sz="1400" b="1" i="0">
-                <a:solidFill>
-                  <a:srgbClr val="556374"/>
-                </a:solidFill>
-                <a:latin typeface="Calibri"/>
-              </a:rPr>
-              <a:t>🖼  sample_grid.png</a:t>
-            </a:r>
-          </a:p>
-          <a:p>
-            <a:pPr algn="ctr">
-              <a:spcBef>
-                <a:spcPts val="0"/>
-              </a:spcBef>
-              <a:spcAft>
-                <a:spcPts val="0"/>
-              </a:spcAft>
-            </a:pPr>
-            <a:r>
-              <a:rPr sz="1100" b="0" i="1">
-                <a:solidFill>
-                  <a:srgbClr val="556374"/>
-                </a:solidFill>
-                <a:latin typeface="Calibri"/>
-              </a:rPr>
-              <a:t>paste from results.zip (Kaggle run)</a:t>
-            </a:r>
-          </a:p>
-        </p:txBody>
-      </p:sp>
-      <p:sp>
-        <p:nvSpPr>
-          <p:cNvPr id="15" name="TextBox 14"/>
+        </p:spPr>
+      </p:pic>
+      <p:sp>
+        <p:nvSpPr>
+          <p:cNvPr id="14" name="TextBox 13"/>
           <p:cNvSpPr txBox="1"/>
           <p:nvPr/>
         </p:nvSpPr>
@@ -8203,118 +7948,33 @@
           </a:p>
         </p:txBody>
       </p:sp>
-      <p:sp>
-        <p:nvSpPr>
-          <p:cNvPr id="16" name="Rounded Rectangle 15"/>
-          <p:cNvSpPr/>
-          <p:nvPr/>
-        </p:nvSpPr>
-        <p:spPr>
-          <a:xfrm>
-            <a:off x="6199632" y="3977639"/>
-            <a:ext cx="5349240" cy="2377440"/>
-          </a:xfrm>
-          <a:prstGeom prst="roundRect">
-            <a:avLst>
-              <a:gd name="adj" fmla="val 3000"/>
-            </a:avLst>
-          </a:prstGeom>
-          <a:solidFill>
-            <a:srgbClr val="F1F4F8"/>
-          </a:solidFill>
-          <a:ln w="15875">
-            <a:solidFill>
-              <a:srgbClr val="B6C4D6"/>
-            </a:solidFill>
-          </a:ln>
-          <a:effectLst/>
-        </p:spPr>
-        <p:style>
-          <a:lnRef idx="1">
-            <a:schemeClr val="accent1"/>
-          </a:lnRef>
-          <a:fillRef idx="3">
-            <a:schemeClr val="accent1"/>
-          </a:fillRef>
-          <a:effectRef idx="2">
-            <a:schemeClr val="accent1"/>
-          </a:effectRef>
-          <a:fontRef idx="minor">
-            <a:schemeClr val="lt1"/>
-          </a:fontRef>
-        </p:style>
-        <p:txBody>
-          <a:bodyPr rtlCol="0" anchor="ctr"/>
-          <a:lstStyle/>
-          <a:p>
-            <a:pPr algn="ctr"/>
-          </a:p>
-        </p:txBody>
-      </p:sp>
-      <p:sp>
-        <p:nvSpPr>
-          <p:cNvPr id="17" name="TextBox 16"/>
-          <p:cNvSpPr txBox="1"/>
-          <p:nvPr/>
-        </p:nvSpPr>
-        <p:spPr>
-          <a:xfrm>
-            <a:off x="6199632" y="3977639"/>
-            <a:ext cx="5349240" cy="2377440"/>
+      <p:pic>
+        <p:nvPicPr>
+          <p:cNvPr id="15" name="Picture 14" descr="class_distribution.png"/>
+          <p:cNvPicPr>
+            <a:picLocks noChangeAspect="1"/>
+          </p:cNvPicPr>
+          <p:nvPr/>
+        </p:nvPicPr>
+        <p:blipFill>
+          <a:blip r:embed="rId3"/>
+          <a:stretch>
+            <a:fillRect/>
+          </a:stretch>
+        </p:blipFill>
+        <p:spPr>
+          <a:xfrm>
+            <a:off x="6199632" y="4274820"/>
+            <a:ext cx="5349240" cy="1783080"/>
           </a:xfrm>
           <a:prstGeom prst="rect">
             <a:avLst/>
           </a:prstGeom>
-          <a:noFill/>
-        </p:spPr>
-        <p:txBody>
-          <a:bodyPr wrap="square" anchor="ctr" lIns="45720" rIns="45720" tIns="18288" bIns="18288">
-            <a:spAutoFit/>
-          </a:bodyPr>
-          <a:lstStyle/>
-          <a:p>
-            <a:pPr algn="ctr">
-              <a:spcBef>
-                <a:spcPts val="0"/>
-              </a:spcBef>
-              <a:spcAft>
-                <a:spcPts val="400"/>
-              </a:spcAft>
-            </a:pPr>
-            <a:r>
-              <a:rPr sz="1400" b="1" i="0">
-                <a:solidFill>
-                  <a:srgbClr val="556374"/>
-                </a:solidFill>
-                <a:latin typeface="Calibri"/>
-              </a:rPr>
-              <a:t>🖼  class_distribution.png</a:t>
-            </a:r>
-          </a:p>
-          <a:p>
-            <a:pPr algn="ctr">
-              <a:spcBef>
-                <a:spcPts val="0"/>
-              </a:spcBef>
-              <a:spcAft>
-                <a:spcPts val="0"/>
-              </a:spcAft>
-            </a:pPr>
-            <a:r>
-              <a:rPr sz="1100" b="0" i="1">
-                <a:solidFill>
-                  <a:srgbClr val="556374"/>
-                </a:solidFill>
-                <a:latin typeface="Calibri"/>
-              </a:rPr>
-              <a:t>paste from results.zip (Kaggle run)</a:t>
-            </a:r>
-          </a:p>
-        </p:txBody>
-      </p:sp>
-      <p:sp>
-        <p:nvSpPr>
-          <p:cNvPr id="18" name="TextBox 17"/>
+        </p:spPr>
+      </p:pic>
+      <p:sp>
+        <p:nvSpPr>
+          <p:cNvPr id="16" name="TextBox 15"/>
           <p:cNvSpPr txBox="1"/>
           <p:nvPr/>
         </p:nvSpPr>
@@ -9853,7 +9513,7 @@
                 </a:solidFill>
                 <a:latin typeface="Calibri"/>
               </a:rPr>
-              <a:t>~4.0M parameters; lightweight baseline.</a:t>
+              <a:t>~0.48M parameters; lightweight baseline.</a:t>
             </a:r>
           </a:p>
         </p:txBody>
@@ -9998,7 +9658,7 @@
                 </a:solidFill>
                 <a:latin typeface="Calibri"/>
               </a:rPr>
-              <a:t>Two-phase fine-tuning; ~7.1M parameters.</a:t>
+              <a:t>Two-phase fine-tuning; ~6.0M parameters.</a:t>
             </a:r>
           </a:p>
           <a:p>
@@ -10017,7 +9677,7 @@
                 </a:solidFill>
                 <a:latin typeface="Calibri"/>
               </a:rPr>
-              <a:t>Efficiency-focused.</a:t>
+              <a:t>Efficiency-focused; best trade-off.</a:t>
             </a:r>
           </a:p>
         </p:txBody>
@@ -10162,7 +9822,7 @@
                 </a:solidFill>
                 <a:latin typeface="Calibri"/>
               </a:rPr>
-              <a:t>Two-phase fine-tuning; ~28.6M parameters.</a:t>
+              <a:t>Two-phase fine-tuning; ~27.9M parameters.</a:t>
             </a:r>
           </a:p>
           <a:p>
@@ -10181,7 +9841,7 @@
                 </a:solidFill>
                 <a:latin typeface="Calibri"/>
               </a:rPr>
-              <a:t>Highest capacity.</a:t>
+              <a:t>Highest capacity and accuracy.</a:t>
             </a:r>
           </a:p>
         </p:txBody>
@@ -10496,118 +10156,33 @@
           </a:p>
         </p:txBody>
       </p:sp>
-      <p:sp>
-        <p:nvSpPr>
-          <p:cNvPr id="7" name="Rounded Rectangle 6"/>
-          <p:cNvSpPr/>
-          <p:nvPr/>
-        </p:nvSpPr>
-        <p:spPr>
-          <a:xfrm>
-            <a:off x="640080" y="1874519"/>
-            <a:ext cx="6766560" cy="4206240"/>
-          </a:xfrm>
-          <a:prstGeom prst="roundRect">
-            <a:avLst>
-              <a:gd name="adj" fmla="val 3000"/>
-            </a:avLst>
-          </a:prstGeom>
-          <a:solidFill>
-            <a:srgbClr val="F1F4F8"/>
-          </a:solidFill>
-          <a:ln w="15875">
-            <a:solidFill>
-              <a:srgbClr val="B6C4D6"/>
-            </a:solidFill>
-          </a:ln>
-          <a:effectLst/>
-        </p:spPr>
-        <p:style>
-          <a:lnRef idx="1">
-            <a:schemeClr val="accent1"/>
-          </a:lnRef>
-          <a:fillRef idx="3">
-            <a:schemeClr val="accent1"/>
-          </a:fillRef>
-          <a:effectRef idx="2">
-            <a:schemeClr val="accent1"/>
-          </a:effectRef>
-          <a:fontRef idx="minor">
-            <a:schemeClr val="lt1"/>
-          </a:fontRef>
-        </p:style>
-        <p:txBody>
-          <a:bodyPr rtlCol="0" anchor="ctr"/>
-          <a:lstStyle/>
-          <a:p>
-            <a:pPr algn="ctr"/>
-          </a:p>
-        </p:txBody>
-      </p:sp>
-      <p:sp>
-        <p:nvSpPr>
-          <p:cNvPr id="8" name="TextBox 7"/>
-          <p:cNvSpPr txBox="1"/>
-          <p:nvPr/>
-        </p:nvSpPr>
-        <p:spPr>
-          <a:xfrm>
-            <a:off x="640080" y="1874519"/>
-            <a:ext cx="6766560" cy="4206240"/>
+      <p:pic>
+        <p:nvPicPr>
+          <p:cNvPr id="7" name="Picture 6" descr="training_curves.png"/>
+          <p:cNvPicPr>
+            <a:picLocks noChangeAspect="1"/>
+          </p:cNvPicPr>
+          <p:nvPr/>
+        </p:nvPicPr>
+        <p:blipFill>
+          <a:blip r:embed="rId2"/>
+          <a:stretch>
+            <a:fillRect/>
+          </a:stretch>
+        </p:blipFill>
+        <p:spPr>
+          <a:xfrm>
+            <a:off x="640080" y="2806504"/>
+            <a:ext cx="6766560" cy="2342270"/>
           </a:xfrm>
           <a:prstGeom prst="rect">
             <a:avLst/>
           </a:prstGeom>
-          <a:noFill/>
-        </p:spPr>
-        <p:txBody>
-          <a:bodyPr wrap="square" anchor="ctr" lIns="45720" rIns="45720" tIns="18288" bIns="18288">
-            <a:spAutoFit/>
-          </a:bodyPr>
-          <a:lstStyle/>
-          <a:p>
-            <a:pPr algn="ctr">
-              <a:spcBef>
-                <a:spcPts val="0"/>
-              </a:spcBef>
-              <a:spcAft>
-                <a:spcPts val="400"/>
-              </a:spcAft>
-            </a:pPr>
-            <a:r>
-              <a:rPr sz="1400" b="1" i="0">
-                <a:solidFill>
-                  <a:srgbClr val="556374"/>
-                </a:solidFill>
-                <a:latin typeface="Calibri"/>
-              </a:rPr>
-              <a:t>🖼  training_curves.png</a:t>
-            </a:r>
-          </a:p>
-          <a:p>
-            <a:pPr algn="ctr">
-              <a:spcBef>
-                <a:spcPts val="0"/>
-              </a:spcBef>
-              <a:spcAft>
-                <a:spcPts val="0"/>
-              </a:spcAft>
-            </a:pPr>
-            <a:r>
-              <a:rPr sz="1100" b="0" i="1">
-                <a:solidFill>
-                  <a:srgbClr val="556374"/>
-                </a:solidFill>
-                <a:latin typeface="Calibri"/>
-              </a:rPr>
-              <a:t>paste from results.zip (Kaggle run)</a:t>
-            </a:r>
-          </a:p>
-        </p:txBody>
-      </p:sp>
-      <p:sp>
-        <p:nvSpPr>
-          <p:cNvPr id="9" name="TextBox 8"/>
+        </p:spPr>
+      </p:pic>
+      <p:sp>
+        <p:nvSpPr>
+          <p:cNvPr id="8" name="TextBox 7"/>
           <p:cNvSpPr txBox="1"/>
           <p:nvPr/>
         </p:nvSpPr>
@@ -11208,7 +10783,7 @@
                           </a:solidFill>
                           <a:latin typeface="Calibri"/>
                         </a:rPr>
-                        <a:t>0.813</a:t>
+                        <a:t>0.472</a:t>
                       </a:r>
                     </a:p>
                   </a:txBody>
@@ -11231,7 +10806,7 @@
                           </a:solidFill>
                           <a:latin typeface="Calibri"/>
                         </a:rPr>
-                        <a:t>0.796</a:t>
+                        <a:t>0.429</a:t>
                       </a:r>
                     </a:p>
                   </a:txBody>
@@ -11254,7 +10829,7 @@
                           </a:solidFill>
                           <a:latin typeface="Calibri"/>
                         </a:rPr>
-                        <a:t>0.928</a:t>
+                        <a:t>0.676</a:t>
                       </a:r>
                     </a:p>
                   </a:txBody>
@@ -11277,7 +10852,7 @@
                           </a:solidFill>
                           <a:latin typeface="Calibri"/>
                         </a:rPr>
-                        <a:t>4.0 M</a:t>
+                        <a:t>0.48 M</a:t>
                       </a:r>
                     </a:p>
                   </a:txBody>
@@ -11300,7 +10875,7 @@
                           </a:solidFill>
                           <a:latin typeface="Calibri"/>
                         </a:rPr>
-                        <a:t>16 MB</a:t>
+                        <a:t>1.9 MB</a:t>
                       </a:r>
                     </a:p>
                   </a:txBody>
@@ -11323,7 +10898,7 @@
                           </a:solidFill>
                           <a:latin typeface="Calibri"/>
                         </a:rPr>
-                        <a:t>31.5 ms</a:t>
+                        <a:t>0.6 ms</a:t>
                       </a:r>
                     </a:p>
                   </a:txBody>
@@ -11342,36 +10917,13 @@
                     <a:p>
                       <a:pPr algn="l"/>
                       <a:r>
-                        <a:rPr sz="1350" b="1" i="0">
+                        <a:rPr sz="1350" b="0" i="0">
                           <a:solidFill>
-                            <a:srgbClr val="213952"/>
+                            <a:srgbClr val="1F2A37"/>
                           </a:solidFill>
                           <a:latin typeface="Calibri"/>
                         </a:rPr>
-                        <a:t>EfficientNetV2-B0  ✓</a:t>
-                      </a:r>
-                    </a:p>
-                  </a:txBody>
-                  <a:tcPr anchor="ctr">
-                    <a:solidFill>
-                      <a:srgbClr val="EEF4FB"/>
-                    </a:solidFill>
-                  </a:tcPr>
-                </a:tc>
-                <a:tc>
-                  <a:txBody>
-                    <a:bodyPr/>
-                    <a:lstStyle/>
-                    <a:p>
-                      <a:pPr algn="ctr"/>
-                      <a:r>
-                        <a:rPr sz="1350" b="1" i="0">
-                          <a:solidFill>
-                            <a:srgbClr val="213952"/>
-                          </a:solidFill>
-                          <a:latin typeface="Calibri"/>
-                        </a:rPr>
-                        <a:t>0.910</a:t>
+                        <a:t>EfficientNetV2-B0</a:t>
                       </a:r>
                     </a:p>
                   </a:txBody>
@@ -11390,11 +10942,11 @@
                       <a:r>
                         <a:rPr sz="1350" b="0" i="0">
                           <a:solidFill>
-                            <a:srgbClr val="213952"/>
+                            <a:srgbClr val="1F2A37"/>
                           </a:solidFill>
                           <a:latin typeface="Calibri"/>
                         </a:rPr>
-                        <a:t>0.895</a:t>
+                        <a:t>0.962</a:t>
                       </a:r>
                     </a:p>
                   </a:txBody>
@@ -11413,11 +10965,11 @@
                       <a:r>
                         <a:rPr sz="1350" b="0" i="0">
                           <a:solidFill>
-                            <a:srgbClr val="213952"/>
+                            <a:srgbClr val="1F2A37"/>
                           </a:solidFill>
                           <a:latin typeface="Calibri"/>
                         </a:rPr>
-                        <a:t>0.976</a:t>
+                        <a:t>0.960</a:t>
                       </a:r>
                     </a:p>
                   </a:txBody>
@@ -11436,11 +10988,11 @@
                       <a:r>
                         <a:rPr sz="1350" b="0" i="0">
                           <a:solidFill>
-                            <a:srgbClr val="213952"/>
+                            <a:srgbClr val="1F2A37"/>
                           </a:solidFill>
                           <a:latin typeface="Calibri"/>
                         </a:rPr>
-                        <a:t>7.1 M</a:t>
+                        <a:t>0.992</a:t>
                       </a:r>
                     </a:p>
                   </a:txBody>
@@ -11459,11 +11011,11 @@
                       <a:r>
                         <a:rPr sz="1350" b="0" i="0">
                           <a:solidFill>
-                            <a:srgbClr val="213952"/>
+                            <a:srgbClr val="1F2A37"/>
                           </a:solidFill>
                           <a:latin typeface="Calibri"/>
                         </a:rPr>
-                        <a:t>28 MB</a:t>
+                        <a:t>6.05 M</a:t>
                       </a:r>
                     </a:p>
                   </a:txBody>
@@ -11482,11 +11034,34 @@
                       <a:r>
                         <a:rPr sz="1350" b="0" i="0">
                           <a:solidFill>
-                            <a:srgbClr val="213952"/>
+                            <a:srgbClr val="1F2A37"/>
                           </a:solidFill>
                           <a:latin typeface="Calibri"/>
                         </a:rPr>
-                        <a:t>20.4 ms</a:t>
+                        <a:t>24 MB</a:t>
+                      </a:r>
+                    </a:p>
+                  </a:txBody>
+                  <a:tcPr anchor="ctr">
+                    <a:solidFill>
+                      <a:srgbClr val="EEF4FB"/>
+                    </a:solidFill>
+                  </a:tcPr>
+                </a:tc>
+                <a:tc>
+                  <a:txBody>
+                    <a:bodyPr/>
+                    <a:lstStyle/>
+                    <a:p>
+                      <a:pPr algn="ctr"/>
+                      <a:r>
+                        <a:rPr sz="1350" b="0" i="0">
+                          <a:solidFill>
+                            <a:srgbClr val="1F2A37"/>
+                          </a:solidFill>
+                          <a:latin typeface="Calibri"/>
+                        </a:rPr>
+                        <a:t>9.6 ms</a:t>
                       </a:r>
                     </a:p>
                   </a:txBody>
@@ -11505,13 +11080,36 @@
                     <a:p>
                       <a:pPr algn="l"/>
                       <a:r>
-                        <a:rPr sz="1350" b="0" i="0">
+                        <a:rPr sz="1350" b="1" i="0">
                           <a:solidFill>
-                            <a:srgbClr val="1F2A37"/>
+                            <a:srgbClr val="213952"/>
                           </a:solidFill>
                           <a:latin typeface="Calibri"/>
                         </a:rPr>
-                        <a:t>ConvNeXt-Tiny</a:t>
+                        <a:t>ConvNeXt-Tiny  ✓</a:t>
+                      </a:r>
+                    </a:p>
+                  </a:txBody>
+                  <a:tcPr anchor="ctr">
+                    <a:solidFill>
+                      <a:srgbClr val="FFFFFF"/>
+                    </a:solidFill>
+                  </a:tcPr>
+                </a:tc>
+                <a:tc>
+                  <a:txBody>
+                    <a:bodyPr/>
+                    <a:lstStyle/>
+                    <a:p>
+                      <a:pPr algn="ctr"/>
+                      <a:r>
+                        <a:rPr sz="1350" b="1" i="0">
+                          <a:solidFill>
+                            <a:srgbClr val="213952"/>
+                          </a:solidFill>
+                          <a:latin typeface="Calibri"/>
+                        </a:rPr>
+                        <a:t>0.964</a:t>
                       </a:r>
                     </a:p>
                   </a:txBody>
@@ -11530,11 +11128,11 @@
                       <a:r>
                         <a:rPr sz="1350" b="0" i="0">
                           <a:solidFill>
-                            <a:srgbClr val="1F2A37"/>
+                            <a:srgbClr val="213952"/>
                           </a:solidFill>
                           <a:latin typeface="Calibri"/>
                         </a:rPr>
-                        <a:t>0.891</a:t>
+                        <a:t>0.963</a:t>
                       </a:r>
                     </a:p>
                   </a:txBody>
@@ -11553,11 +11151,11 @@
                       <a:r>
                         <a:rPr sz="1350" b="0" i="0">
                           <a:solidFill>
-                            <a:srgbClr val="1F2A37"/>
+                            <a:srgbClr val="213952"/>
                           </a:solidFill>
                           <a:latin typeface="Calibri"/>
                         </a:rPr>
-                        <a:t>0.880</a:t>
+                        <a:t>0.994</a:t>
                       </a:r>
                     </a:p>
                   </a:txBody>
@@ -11576,11 +11174,11 @@
                       <a:r>
                         <a:rPr sz="1350" b="0" i="0">
                           <a:solidFill>
-                            <a:srgbClr val="1F2A37"/>
+                            <a:srgbClr val="213952"/>
                           </a:solidFill>
                           <a:latin typeface="Calibri"/>
                         </a:rPr>
-                        <a:t>0.965</a:t>
+                        <a:t>27.9 M</a:t>
                       </a:r>
                     </a:p>
                   </a:txBody>
@@ -11599,11 +11197,11 @@
                       <a:r>
                         <a:rPr sz="1350" b="0" i="0">
                           <a:solidFill>
-                            <a:srgbClr val="1F2A37"/>
+                            <a:srgbClr val="213952"/>
                           </a:solidFill>
                           <a:latin typeface="Calibri"/>
                         </a:rPr>
-                        <a:t>28.6 M</a:t>
+                        <a:t>112 MB</a:t>
                       </a:r>
                     </a:p>
                   </a:txBody>
@@ -11622,34 +11220,11 @@
                       <a:r>
                         <a:rPr sz="1350" b="0" i="0">
                           <a:solidFill>
-                            <a:srgbClr val="1F2A37"/>
+                            <a:srgbClr val="213952"/>
                           </a:solidFill>
                           <a:latin typeface="Calibri"/>
                         </a:rPr>
-                        <a:t>114 MB</a:t>
-                      </a:r>
-                    </a:p>
-                  </a:txBody>
-                  <a:tcPr anchor="ctr">
-                    <a:solidFill>
-                      <a:srgbClr val="FFFFFF"/>
-                    </a:solidFill>
-                  </a:tcPr>
-                </a:tc>
-                <a:tc>
-                  <a:txBody>
-                    <a:bodyPr/>
-                    <a:lstStyle/>
-                    <a:p>
-                      <a:pPr algn="ctr"/>
-                      <a:r>
-                        <a:rPr sz="1350" b="0" i="0">
-                          <a:solidFill>
-                            <a:srgbClr val="1F2A37"/>
-                          </a:solidFill>
-                          <a:latin typeface="Calibri"/>
-                        </a:rPr>
-                        <a:t>23.2 ms</a:t>
+                        <a:t>113 ms</a:t>
                       </a:r>
                     </a:p>
                   </a:txBody>
@@ -11766,7 +11341,7 @@
                 </a:solidFill>
                 <a:latin typeface="Calibri"/>
               </a:rPr>
-              <a:t>Both pretrained backbones beat the from-scratch baseline by roughly 8–10 accuracy points, answering RQ1 and RQ2.</a:t>
+              <a:t>Both pretrained backbones beat the from-scratch baseline by roughly 49 accuracy points (96% vs 47%), answering RQ1 and RQ2.</a:t>
             </a:r>
           </a:p>
         </p:txBody>
@@ -11867,13 +11442,13 @@
               </a:spcAft>
             </a:pPr>
             <a:r>
-              <a:rPr sz="1300" b="0" i="0">
+              <a:rPr sz="1250" b="0" i="0">
                 <a:solidFill>
                   <a:srgbClr val="213952"/>
                 </a:solidFill>
                 <a:latin typeface="Calibri"/>
               </a:rPr>
-              <a:t>EfficientNetV2-B0 delivers the highest accuracy AND the lowest latency at about a quarter of ConvNeXt-Tiny's size — the best balance for deployment (RQ4).</a:t>
+              <a:t>ConvNeXt-Tiny is the most accurate; EfficientNetV2-B0 matches it within 0.2 points at about one-fifth the size and one-twelfth the latency — the best efficiency trade-off (RQ4).</a:t>
             </a:r>
           </a:p>
         </p:txBody>
@@ -12100,118 +11675,33 @@
           </a:p>
         </p:txBody>
       </p:sp>
-      <p:sp>
-        <p:nvSpPr>
-          <p:cNvPr id="7" name="Rounded Rectangle 6"/>
-          <p:cNvSpPr/>
-          <p:nvPr/>
-        </p:nvSpPr>
-        <p:spPr>
-          <a:xfrm>
-            <a:off x="640080" y="1874519"/>
-            <a:ext cx="6583680" cy="4206240"/>
-          </a:xfrm>
-          <a:prstGeom prst="roundRect">
-            <a:avLst>
-              <a:gd name="adj" fmla="val 3000"/>
-            </a:avLst>
-          </a:prstGeom>
-          <a:solidFill>
-            <a:srgbClr val="F1F4F8"/>
-          </a:solidFill>
-          <a:ln w="15875">
-            <a:solidFill>
-              <a:srgbClr val="B6C4D6"/>
-            </a:solidFill>
-          </a:ln>
-          <a:effectLst/>
-        </p:spPr>
-        <p:style>
-          <a:lnRef idx="1">
-            <a:schemeClr val="accent1"/>
-          </a:lnRef>
-          <a:fillRef idx="3">
-            <a:schemeClr val="accent1"/>
-          </a:fillRef>
-          <a:effectRef idx="2">
-            <a:schemeClr val="accent1"/>
-          </a:effectRef>
-          <a:fontRef idx="minor">
-            <a:schemeClr val="lt1"/>
-          </a:fontRef>
-        </p:style>
-        <p:txBody>
-          <a:bodyPr rtlCol="0" anchor="ctr"/>
-          <a:lstStyle/>
-          <a:p>
-            <a:pPr algn="ctr"/>
-          </a:p>
-        </p:txBody>
-      </p:sp>
-      <p:sp>
-        <p:nvSpPr>
-          <p:cNvPr id="8" name="TextBox 7"/>
-          <p:cNvSpPr txBox="1"/>
-          <p:nvPr/>
-        </p:nvSpPr>
-        <p:spPr>
-          <a:xfrm>
-            <a:off x="640080" y="1874519"/>
-            <a:ext cx="6583680" cy="4206240"/>
+      <p:pic>
+        <p:nvPicPr>
+          <p:cNvPr id="7" name="Picture 6" descr="confusion_matrix.png"/>
+          <p:cNvPicPr>
+            <a:picLocks noChangeAspect="1"/>
+          </p:cNvPicPr>
+          <p:nvPr/>
+        </p:nvPicPr>
+        <p:blipFill>
+          <a:blip r:embed="rId2"/>
+          <a:stretch>
+            <a:fillRect/>
+          </a:stretch>
+        </p:blipFill>
+        <p:spPr>
+          <a:xfrm>
+            <a:off x="1565910" y="1874519"/>
+            <a:ext cx="4732020" cy="4206240"/>
           </a:xfrm>
           <a:prstGeom prst="rect">
             <a:avLst/>
           </a:prstGeom>
-          <a:noFill/>
-        </p:spPr>
-        <p:txBody>
-          <a:bodyPr wrap="square" anchor="ctr" lIns="45720" rIns="45720" tIns="18288" bIns="18288">
-            <a:spAutoFit/>
-          </a:bodyPr>
-          <a:lstStyle/>
-          <a:p>
-            <a:pPr algn="ctr">
-              <a:spcBef>
-                <a:spcPts val="0"/>
-              </a:spcBef>
-              <a:spcAft>
-                <a:spcPts val="400"/>
-              </a:spcAft>
-            </a:pPr>
-            <a:r>
-              <a:rPr sz="1400" b="1" i="0">
-                <a:solidFill>
-                  <a:srgbClr val="556374"/>
-                </a:solidFill>
-                <a:latin typeface="Calibri"/>
-              </a:rPr>
-              <a:t>🖼  confusion_matrix.png</a:t>
-            </a:r>
-          </a:p>
-          <a:p>
-            <a:pPr algn="ctr">
-              <a:spcBef>
-                <a:spcPts val="0"/>
-              </a:spcBef>
-              <a:spcAft>
-                <a:spcPts val="0"/>
-              </a:spcAft>
-            </a:pPr>
-            <a:r>
-              <a:rPr sz="1100" b="0" i="1">
-                <a:solidFill>
-                  <a:srgbClr val="556374"/>
-                </a:solidFill>
-                <a:latin typeface="Calibri"/>
-              </a:rPr>
-              <a:t>paste from results.zip (Kaggle run)</a:t>
-            </a:r>
-          </a:p>
-        </p:txBody>
-      </p:sp>
-      <p:sp>
-        <p:nvSpPr>
-          <p:cNvPr id="9" name="TextBox 8"/>
+        </p:spPr>
+      </p:pic>
+      <p:sp>
+        <p:nvSpPr>
+          <p:cNvPr id="8" name="TextBox 7"/>
           <p:cNvSpPr txBox="1"/>
           <p:nvPr/>
         </p:nvSpPr>
@@ -12302,7 +11792,7 @@
                 </a:solidFill>
                 <a:latin typeface="Calibri"/>
               </a:rPr>
-              <a:t>Errors concentrate between visually similar sports — e.g. bowling vs bocce, or related racquet sports.</a:t>
+              <a:t>Errors concentrate between visually similar sports — e.g. horseshoe pitching vs frisbee, baton twirling vs javelin.</a:t>
             </a:r>
           </a:p>
           <a:p>
@@ -12330,7 +11820,7 @@
                 </a:solidFill>
                 <a:latin typeface="Calibri"/>
               </a:rPr>
-              <a:t>Distinctive-scene sports (e.g. swimming, motor racing) are near-perfect.</a:t>
+              <a:t>Distinctive-scene sports (e.g. wingsuit flying, wheelchair racing, weightlifting) score a perfect F1 of 1.0.</a:t>
             </a:r>
           </a:p>
           <a:p>
